--- a/manuscript/ha_supplementary_figures.pptx
+++ b/manuscript/ha_supplementary_figures.pptx
@@ -7,6 +7,7 @@
   <p:sldIdLst>
     <p:sldId id="256" r:id="rId7"/>
     <p:sldId id="257" r:id="rId8"/>
+    <p:sldId id="258" r:id="rId9"/>
   </p:sldIdLst>
   <p:sldSz cx="12191695" cy="6858000" type="screen4x3"/>
   <p:notesSz cx="6858000" cy="9144000"/>
@@ -6106,7 +6107,7 @@
         <p:spPr>
           <a:xfrm>
             <a:off x="1097280" y="1005840"/>
-            <a:ext cx="7132320" cy="4754880"/>
+            <a:ext cx="4279392" cy="4754880"/>
           </a:xfrm>
           <a:prstGeom prst="rect">
             <a:avLst/>
@@ -6137,7 +6138,7 @@
           <a:p>
             <a:r>
               <a:rPr sz="1400"/>
-              <a:t>Closed malpractice claims per 1,000 physicians by specialty, 2008–2024 (rates, not counts).</a:t>
+              <a:t>Sensitivity-analysis framework for evaluating malpractice-litigation risk as a healthcare workforce-allocation lever.</a:t>
             </a:r>
           </a:p>
         </p:txBody>
@@ -6192,6 +6193,106 @@
       <p:pic>
         <p:nvPicPr>
           <p:cNvPr id="3" name="Picture 2" descr="ha_Supplementary_Figure_2.png"/>
+          <p:cNvPicPr>
+            <a:picLocks noChangeAspect="1"/>
+          </p:cNvPicPr>
+          <p:nvPr/>
+        </p:nvPicPr>
+        <p:blipFill>
+          <a:blip r:embed="rId2"/>
+          <a:stretch>
+            <a:fillRect/>
+          </a:stretch>
+        </p:blipFill>
+        <p:spPr>
+          <a:xfrm>
+            <a:off x="1097280" y="1005840"/>
+            <a:ext cx="7132320" cy="4754880"/>
+          </a:xfrm>
+          <a:prstGeom prst="rect">
+            <a:avLst/>
+          </a:prstGeom>
+        </p:spPr>
+      </p:pic>
+      <p:sp>
+        <p:nvSpPr>
+          <p:cNvPr id="4" name="TextBox 3"/>
+          <p:cNvSpPr txBox="1"/>
+          <p:nvPr/>
+        </p:nvSpPr>
+        <p:spPr>
+          <a:xfrm>
+            <a:off x="457200" y="5943600"/>
+            <a:ext cx="11247120" cy="822960"/>
+          </a:xfrm>
+          <a:prstGeom prst="rect">
+            <a:avLst/>
+          </a:prstGeom>
+          <a:noFill/>
+        </p:spPr>
+        <p:txBody>
+          <a:bodyPr wrap="square">
+            <a:spAutoFit/>
+          </a:bodyPr>
+          <a:lstStyle/>
+          <a:p>
+            <a:r>
+              <a:rPr sz="1400"/>
+              <a:t>Closed malpractice claims per 1,000 physicians by specialty, 2008–2024 (rates, not counts).</a:t>
+            </a:r>
+          </a:p>
+        </p:txBody>
+      </p:sp>
+    </p:spTree>
+  </p:cSld>
+  <p:clrMapOvr>
+    <a:masterClrMapping/>
+  </p:clrMapOvr>
+</p:sld>
+</file>
+
+<file path=ppt/slides/slide3.xml><?xml version="1.0" encoding="utf-8"?>
+<p:sld xmlns:a="http://schemas.openxmlformats.org/drawingml/2006/main" xmlns:p="http://schemas.openxmlformats.org/presentationml/2006/main" xmlns:r="http://schemas.openxmlformats.org/officeDocument/2006/relationships">
+  <p:cSld>
+    <p:spTree>
+      <p:nvGrpSpPr>
+        <p:cNvPr id="1" name=""/>
+        <p:cNvGrpSpPr/>
+        <p:nvPr/>
+      </p:nvGrpSpPr>
+      <p:grpSpPr/>
+      <p:sp>
+        <p:nvSpPr>
+          <p:cNvPr id="2" name="TextBox 1"/>
+          <p:cNvSpPr txBox="1"/>
+          <p:nvPr/>
+        </p:nvSpPr>
+        <p:spPr>
+          <a:xfrm>
+            <a:off x="457200" y="182880"/>
+            <a:ext cx="11247120" cy="640080"/>
+          </a:xfrm>
+          <a:prstGeom prst="rect">
+            <a:avLst/>
+          </a:prstGeom>
+          <a:noFill/>
+        </p:spPr>
+        <p:txBody>
+          <a:bodyPr wrap="none">
+            <a:spAutoFit/>
+          </a:bodyPr>
+          <a:lstStyle/>
+          <a:p>
+            <a:r>
+              <a:rPr sz="2400" b="1"/>
+              <a:t>Supplementary Figure 3</a:t>
+            </a:r>
+          </a:p>
+        </p:txBody>
+      </p:sp>
+      <p:pic>
+        <p:nvPicPr>
+          <p:cNvPr id="3" name="Picture 2" descr="ha_Supplementary_Figure_3.png"/>
           <p:cNvPicPr>
             <a:picLocks noChangeAspect="1"/>
           </p:cNvPicPr>

--- a/manuscript/ha_supplementary_figures.pptx
+++ b/manuscript/ha_supplementary_figures.pptx
@@ -6238,7 +6238,7 @@
           <a:p>
             <a:r>
               <a:rPr sz="1400"/>
-              <a:t>Closed malpractice claims per 1,000 physicians by specialty, 2008–2024 (rates, not counts).</a:t>
+              <a:t>Closed malpractice claims per 1,000 physicians by specialty, 2008-2024 (rates, not counts).</a:t>
             </a:r>
           </a:p>
         </p:txBody>

--- a/manuscript/ha_supplementary_figures.pptx
+++ b/manuscript/ha_supplementary_figures.pptx
@@ -332,7 +332,7 @@
           <a:p>
             <a:fld id="{C1FF6DA9-008F-8B48-92A6-B652298478BF}" type="slidenum">
               <a:rPr lang="en-US" smtClean="0"/>
-              <a:t>‹#›</a:t>
+              <a:t>#</a:t>
             </a:fld>
             <a:endParaRPr lang="en-US"/>
           </a:p>
@@ -574,7 +574,7 @@
           <a:p>
             <a:fld id="{C1FF6DA9-008F-8B48-92A6-B652298478BF}" type="slidenum">
               <a:rPr lang="en-US" smtClean="0"/>
-              <a:t>‹#›</a:t>
+              <a:t>#</a:t>
             </a:fld>
             <a:endParaRPr lang="en-US"/>
           </a:p>
@@ -744,7 +744,7 @@
           <a:p>
             <a:fld id="{C1FF6DA9-008F-8B48-92A6-B652298478BF}" type="slidenum">
               <a:rPr lang="en-US" smtClean="0"/>
-              <a:t>‹#›</a:t>
+              <a:t>#</a:t>
             </a:fld>
             <a:endParaRPr lang="en-US"/>
           </a:p>
@@ -914,7 +914,7 @@
           <a:p>
             <a:fld id="{C1FF6DA9-008F-8B48-92A6-B652298478BF}" type="slidenum">
               <a:rPr lang="en-US" smtClean="0"/>
-              <a:t>‹#›</a:t>
+              <a:t>#</a:t>
             </a:fld>
             <a:endParaRPr lang="en-US"/>
           </a:p>
@@ -1094,7 +1094,7 @@
           <a:p>
             <a:fld id="{C1FF6DA9-008F-8B48-92A6-B652298478BF}" type="slidenum">
               <a:rPr lang="en-US" smtClean="0"/>
-              <a:t>‹#›</a:t>
+              <a:t>#</a:t>
             </a:fld>
             <a:endParaRPr lang="en-US"/>
           </a:p>
@@ -1274,7 +1274,7 @@
           <a:p>
             <a:fld id="{C1FF6DA9-008F-8B48-92A6-B652298478BF}" type="slidenum">
               <a:rPr lang="en-US" smtClean="0"/>
-              <a:t>‹#›</a:t>
+              <a:t>#</a:t>
             </a:fld>
             <a:endParaRPr lang="en-US"/>
           </a:p>
@@ -1444,7 +1444,7 @@
           <a:p>
             <a:fld id="{C1FF6DA9-008F-8B48-92A6-B652298478BF}" type="slidenum">
               <a:rPr lang="en-US" smtClean="0"/>
-              <a:t>‹#›</a:t>
+              <a:t>#</a:t>
             </a:fld>
             <a:endParaRPr lang="en-US"/>
           </a:p>
@@ -1614,7 +1614,7 @@
           <a:p>
             <a:fld id="{C1FF6DA9-008F-8B48-92A6-B652298478BF}" type="slidenum">
               <a:rPr lang="en-US" smtClean="0"/>
-              <a:t>‹#›</a:t>
+              <a:t>#</a:t>
             </a:fld>
             <a:endParaRPr lang="en-US"/>
           </a:p>
@@ -1860,7 +1860,7 @@
           <a:p>
             <a:fld id="{C1FF6DA9-008F-8B48-92A6-B652298478BF}" type="slidenum">
               <a:rPr lang="en-US" smtClean="0"/>
-              <a:t>‹#›</a:t>
+              <a:t>#</a:t>
             </a:fld>
             <a:endParaRPr lang="en-US"/>
           </a:p>
@@ -2106,7 +2106,7 @@
           <a:p>
             <a:fld id="{C1FF6DA9-008F-8B48-92A6-B652298478BF}" type="slidenum">
               <a:rPr lang="en-US" smtClean="0"/>
-              <a:t>‹#›</a:t>
+              <a:t>#</a:t>
             </a:fld>
             <a:endParaRPr lang="en-US"/>
           </a:p>
@@ -2394,7 +2394,7 @@
           <a:p>
             <a:fld id="{C1FF6DA9-008F-8B48-92A6-B652298478BF}" type="slidenum">
               <a:rPr lang="en-US" smtClean="0"/>
-              <a:t>‹#›</a:t>
+              <a:t>#</a:t>
             </a:fld>
             <a:endParaRPr lang="en-US"/>
           </a:p>
@@ -2682,7 +2682,7 @@
           <a:p>
             <a:fld id="{C1FF6DA9-008F-8B48-92A6-B652298478BF}" type="slidenum">
               <a:rPr lang="en-US" smtClean="0"/>
-              <a:t>‹#›</a:t>
+              <a:t>#</a:t>
             </a:fld>
             <a:endParaRPr lang="en-US"/>
           </a:p>
@@ -3104,7 +3104,7 @@
           <a:p>
             <a:fld id="{C1FF6DA9-008F-8B48-92A6-B652298478BF}" type="slidenum">
               <a:rPr lang="en-US" smtClean="0"/>
-              <a:t>‹#›</a:t>
+              <a:t>#</a:t>
             </a:fld>
             <a:endParaRPr lang="en-US"/>
           </a:p>
@@ -3526,7 +3526,7 @@
           <a:p>
             <a:fld id="{C1FF6DA9-008F-8B48-92A6-B652298478BF}" type="slidenum">
               <a:rPr lang="en-US" smtClean="0"/>
-              <a:t>‹#›</a:t>
+              <a:t>#</a:t>
             </a:fld>
             <a:endParaRPr lang="en-US"/>
           </a:p>
@@ -3644,7 +3644,7 @@
           <a:p>
             <a:fld id="{C1FF6DA9-008F-8B48-92A6-B652298478BF}" type="slidenum">
               <a:rPr lang="en-US" smtClean="0"/>
-              <a:t>‹#›</a:t>
+              <a:t>#</a:t>
             </a:fld>
             <a:endParaRPr lang="en-US"/>
           </a:p>
@@ -3762,7 +3762,7 @@
           <a:p>
             <a:fld id="{C1FF6DA9-008F-8B48-92A6-B652298478BF}" type="slidenum">
               <a:rPr lang="en-US" smtClean="0"/>
-              <a:t>‹#›</a:t>
+              <a:t>#</a:t>
             </a:fld>
             <a:endParaRPr lang="en-US"/>
           </a:p>
@@ -3857,7 +3857,7 @@
           <a:p>
             <a:fld id="{C1FF6DA9-008F-8B48-92A6-B652298478BF}" type="slidenum">
               <a:rPr lang="en-US" smtClean="0"/>
-              <a:t>‹#›</a:t>
+              <a:t>#</a:t>
             </a:fld>
             <a:endParaRPr lang="en-US"/>
           </a:p>
@@ -3952,7 +3952,7 @@
           <a:p>
             <a:fld id="{C1FF6DA9-008F-8B48-92A6-B652298478BF}" type="slidenum">
               <a:rPr lang="en-US" smtClean="0"/>
-              <a:t>‹#›</a:t>
+              <a:t>#</a:t>
             </a:fld>
             <a:endParaRPr lang="en-US"/>
           </a:p>
@@ -4229,7 +4229,7 @@
           <a:p>
             <a:fld id="{C1FF6DA9-008F-8B48-92A6-B652298478BF}" type="slidenum">
               <a:rPr lang="en-US" smtClean="0"/>
-              <a:t>‹#›</a:t>
+              <a:t>#</a:t>
             </a:fld>
             <a:endParaRPr lang="en-US"/>
           </a:p>
@@ -4506,7 +4506,7 @@
           <a:p>
             <a:fld id="{C1FF6DA9-008F-8B48-92A6-B652298478BF}" type="slidenum">
               <a:rPr lang="en-US" smtClean="0"/>
-              <a:t>‹#›</a:t>
+              <a:t>#</a:t>
             </a:fld>
             <a:endParaRPr lang="en-US"/>
           </a:p>
@@ -4759,7 +4759,7 @@
           <a:p>
             <a:fld id="{C1FF6DA9-008F-8B48-92A6-B652298478BF}" type="slidenum">
               <a:rPr lang="en-US" smtClean="0"/>
-              <a:t>‹#›</a:t>
+              <a:t>#</a:t>
             </a:fld>
             <a:endParaRPr lang="en-US"/>
           </a:p>
@@ -5012,7 +5012,7 @@
           <a:p>
             <a:fld id="{C1FF6DA9-008F-8B48-92A6-B652298478BF}" type="slidenum">
               <a:rPr lang="en-US" smtClean="0"/>
-              <a:t>‹#›</a:t>
+              <a:t>#</a:t>
             </a:fld>
             <a:endParaRPr lang="en-US"/>
           </a:p>
@@ -5261,7 +5261,7 @@
           <a:p>
             <a:fld id="{C1FF6DA9-008F-8B48-92A6-B652298478BF}" type="slidenum">
               <a:rPr lang="en-US" smtClean="0"/>
-              <a:t>‹#›</a:t>
+              <a:t>#</a:t>
             </a:fld>
             <a:endParaRPr lang="en-US"/>
           </a:p>
@@ -5311,7 +5311,7 @@
           <a:spcPct val="20000"/>
         </a:spcBef>
         <a:buFont typeface="Arial"/>
-        <a:buChar char="•"/>
+        <a:buChar char="*"/>
         <a:defRPr sz="3200" kern="1200">
           <a:solidFill>
             <a:schemeClr val="tx1"/>
@@ -5326,7 +5326,7 @@
           <a:spcPct val="20000"/>
         </a:spcBef>
         <a:buFont typeface="Arial"/>
-        <a:buChar char="–"/>
+        <a:buChar char="-"/>
         <a:defRPr sz="2800" kern="1200">
           <a:solidFill>
             <a:schemeClr val="tx1"/>
@@ -5341,7 +5341,7 @@
           <a:spcPct val="20000"/>
         </a:spcBef>
         <a:buFont typeface="Arial"/>
-        <a:buChar char="•"/>
+        <a:buChar char="*"/>
         <a:defRPr sz="2400" kern="1200">
           <a:solidFill>
             <a:schemeClr val="tx1"/>
@@ -5356,7 +5356,7 @@
           <a:spcPct val="20000"/>
         </a:spcBef>
         <a:buFont typeface="Arial"/>
-        <a:buChar char="–"/>
+        <a:buChar char="-"/>
         <a:defRPr sz="2000" kern="1200">
           <a:solidFill>
             <a:schemeClr val="tx1"/>
@@ -5371,7 +5371,7 @@
           <a:spcPct val="20000"/>
         </a:spcBef>
         <a:buFont typeface="Arial"/>
-        <a:buChar char="»"/>
+        <a:buChar char="&gt;&gt;"/>
         <a:defRPr sz="2000" kern="1200">
           <a:solidFill>
             <a:schemeClr val="tx1"/>
@@ -5386,7 +5386,7 @@
           <a:spcPct val="20000"/>
         </a:spcBef>
         <a:buFont typeface="Arial"/>
-        <a:buChar char="•"/>
+        <a:buChar char="*"/>
         <a:defRPr sz="2000" kern="1200">
           <a:solidFill>
             <a:schemeClr val="tx1"/>
@@ -5401,7 +5401,7 @@
           <a:spcPct val="20000"/>
         </a:spcBef>
         <a:buFont typeface="Arial"/>
-        <a:buChar char="•"/>
+        <a:buChar char="*"/>
         <a:defRPr sz="2000" kern="1200">
           <a:solidFill>
             <a:schemeClr val="tx1"/>
@@ -5416,7 +5416,7 @@
           <a:spcPct val="20000"/>
         </a:spcBef>
         <a:buFont typeface="Arial"/>
-        <a:buChar char="•"/>
+        <a:buChar char="*"/>
         <a:defRPr sz="2000" kern="1200">
           <a:solidFill>
             <a:schemeClr val="tx1"/>
@@ -5431,7 +5431,7 @@
           <a:spcPct val="20000"/>
         </a:spcBef>
         <a:buFont typeface="Arial"/>
-        <a:buChar char="•"/>
+        <a:buChar char="*"/>
         <a:defRPr sz="2000" kern="1200">
           <a:solidFill>
             <a:schemeClr val="tx1"/>
@@ -5771,7 +5771,7 @@
           <a:p>
             <a:fld id="{C1FF6DA9-008F-8B48-92A6-B652298478BF}" type="slidenum">
               <a:rPr lang="en-US" smtClean="0"/>
-              <a:t>‹#›</a:t>
+              <a:t>#</a:t>
             </a:fld>
             <a:endParaRPr lang="en-US"/>
           </a:p>
@@ -5821,7 +5821,7 @@
           <a:spcPct val="20000"/>
         </a:spcBef>
         <a:buFont typeface="Arial"/>
-        <a:buChar char="•"/>
+        <a:buChar char="*"/>
         <a:defRPr sz="3200" kern="1200">
           <a:solidFill>
             <a:schemeClr val="tx1"/>
@@ -5836,7 +5836,7 @@
           <a:spcPct val="20000"/>
         </a:spcBef>
         <a:buFont typeface="Arial"/>
-        <a:buChar char="–"/>
+        <a:buChar char="-"/>
         <a:defRPr sz="2800" kern="1200">
           <a:solidFill>
             <a:schemeClr val="tx1"/>
@@ -5851,7 +5851,7 @@
           <a:spcPct val="20000"/>
         </a:spcBef>
         <a:buFont typeface="Arial"/>
-        <a:buChar char="•"/>
+        <a:buChar char="*"/>
         <a:defRPr sz="2400" kern="1200">
           <a:solidFill>
             <a:schemeClr val="tx1"/>
@@ -5866,7 +5866,7 @@
           <a:spcPct val="20000"/>
         </a:spcBef>
         <a:buFont typeface="Arial"/>
-        <a:buChar char="–"/>
+        <a:buChar char="-"/>
         <a:defRPr sz="2000" kern="1200">
           <a:solidFill>
             <a:schemeClr val="tx1"/>
@@ -5881,7 +5881,7 @@
           <a:spcPct val="20000"/>
         </a:spcBef>
         <a:buFont typeface="Arial"/>
-        <a:buChar char="»"/>
+        <a:buChar char="&gt;&gt;"/>
         <a:defRPr sz="2000" kern="1200">
           <a:solidFill>
             <a:schemeClr val="tx1"/>
@@ -5896,7 +5896,7 @@
           <a:spcPct val="20000"/>
         </a:spcBef>
         <a:buFont typeface="Arial"/>
-        <a:buChar char="•"/>
+        <a:buChar char="*"/>
         <a:defRPr sz="2000" kern="1200">
           <a:solidFill>
             <a:schemeClr val="tx1"/>
@@ -5911,7 +5911,7 @@
           <a:spcPct val="20000"/>
         </a:spcBef>
         <a:buFont typeface="Arial"/>
-        <a:buChar char="•"/>
+        <a:buChar char="*"/>
         <a:defRPr sz="2000" kern="1200">
           <a:solidFill>
             <a:schemeClr val="tx1"/>
@@ -5926,7 +5926,7 @@
           <a:spcPct val="20000"/>
         </a:spcBef>
         <a:buFont typeface="Arial"/>
-        <a:buChar char="•"/>
+        <a:buChar char="*"/>
         <a:defRPr sz="2000" kern="1200">
           <a:solidFill>
             <a:schemeClr val="tx1"/>
@@ -5941,7 +5941,7 @@
           <a:spcPct val="20000"/>
         </a:spcBef>
         <a:buFont typeface="Arial"/>
-        <a:buChar char="•"/>
+        <a:buChar char="*"/>
         <a:defRPr sz="2000" kern="1200">
           <a:solidFill>
             <a:schemeClr val="tx1"/>
@@ -6397,10 +6397,10 @@
         <a:latin typeface="Calibri"/>
         <a:ea typeface=""/>
         <a:cs typeface=""/>
-        <a:font script="Jpan" typeface="ＭＳ Ｐゴシック"/>
-        <a:font script="Hang" typeface="맑은 고딕"/>
-        <a:font script="Hans" typeface="宋体"/>
-        <a:font script="Hant" typeface="新細明體"/>
+        <a:font script="Jpan" typeface="MS PGothic"/>
+        <a:font script="Hang" typeface="Malgun Gothic"/>
+        <a:font script="Hans" typeface="SimSun"/>
+        <a:font script="Hant" typeface="PMingLiU"/>
         <a:font script="Arab" typeface="Times New Roman"/>
         <a:font script="Hebr" typeface="Times New Roman"/>
         <a:font script="Thai" typeface="Angsana New"/>
@@ -6432,10 +6432,10 @@
         <a:latin typeface="Calibri"/>
         <a:ea typeface=""/>
         <a:cs typeface=""/>
-        <a:font script="Jpan" typeface="ＭＳ Ｐゴシック"/>
-        <a:font script="Hang" typeface="맑은 고딕"/>
-        <a:font script="Hans" typeface="宋体"/>
-        <a:font script="Hant" typeface="新細明體"/>
+        <a:font script="Jpan" typeface="MS PGothic"/>
+        <a:font script="Hang" typeface="Malgun Gothic"/>
+        <a:font script="Hans" typeface="SimSun"/>
+        <a:font script="Hant" typeface="PMingLiU"/>
         <a:font script="Arab" typeface="Arial"/>
         <a:font script="Hebr" typeface="Arial"/>
         <a:font script="Thai" typeface="Cordia New"/>
@@ -6717,10 +6717,10 @@
         <a:latin typeface="Calibri"/>
         <a:ea typeface=""/>
         <a:cs typeface=""/>
-        <a:font script="Jpan" typeface="ＭＳ Ｐゴシック"/>
-        <a:font script="Hang" typeface="맑은 고딕"/>
-        <a:font script="Hans" typeface="宋体"/>
-        <a:font script="Hant" typeface="新細明體"/>
+        <a:font script="Jpan" typeface="MS PGothic"/>
+        <a:font script="Hang" typeface="Malgun Gothic"/>
+        <a:font script="Hans" typeface="SimSun"/>
+        <a:font script="Hant" typeface="PMingLiU"/>
         <a:font script="Arab" typeface="Times New Roman"/>
         <a:font script="Hebr" typeface="Times New Roman"/>
         <a:font script="Thai" typeface="Angsana New"/>
@@ -6752,10 +6752,10 @@
         <a:latin typeface="Calibri"/>
         <a:ea typeface=""/>
         <a:cs typeface=""/>
-        <a:font script="Jpan" typeface="ＭＳ Ｐゴシック"/>
-        <a:font script="Hang" typeface="맑은 고딕"/>
-        <a:font script="Hans" typeface="宋体"/>
-        <a:font script="Hant" typeface="新細明體"/>
+        <a:font script="Jpan" typeface="MS PGothic"/>
+        <a:font script="Hang" typeface="Malgun Gothic"/>
+        <a:font script="Hans" typeface="SimSun"/>
+        <a:font script="Hant" typeface="PMingLiU"/>
         <a:font script="Arab" typeface="Arial"/>
         <a:font script="Hebr" typeface="Arial"/>
         <a:font script="Thai" typeface="Cordia New"/>

--- a/manuscript/ha_supplementary_figures.pptx
+++ b/manuscript/ha_supplementary_figures.pptx
@@ -6138,7 +6138,7 @@
           <a:p>
             <a:r>
               <a:rPr sz="1400"/>
-              <a:t>Sensitivity-analysis framework for evaluating malpractice-litigation risk as a healthcare workforce-allocation lever.</a:t>
+              <a:t>Sensitivity-analysis framework for evaluating malpractice-litigation risk as a healthcare workforce-allocation instrument.</a:t>
             </a:r>
           </a:p>
         </p:txBody>

--- a/manuscript/ha_supplementary_figures.pptx
+++ b/manuscript/ha_supplementary_figures.pptx
@@ -5371,7 +5371,7 @@
           <a:spcPct val="20000"/>
         </a:spcBef>
         <a:buFont typeface="Arial"/>
-        <a:buChar char="&gt;&gt;"/>
+        <a:buChar char="»"/>
         <a:defRPr sz="2000" kern="1200">
           <a:solidFill>
             <a:schemeClr val="tx1"/>
@@ -5881,7 +5881,7 @@
           <a:spcPct val="20000"/>
         </a:spcBef>
         <a:buFont typeface="Arial"/>
-        <a:buChar char="&gt;&gt;"/>
+        <a:buChar char="»"/>
         <a:defRPr sz="2000" kern="1200">
           <a:solidFill>
             <a:schemeClr val="tx1"/>
